--- a/LectureNotes/M5-Texture-Mapping-Slides/TextureMapping.pptx
+++ b/LectureNotes/M5-Texture-Mapping-Slides/TextureMapping.pptx
@@ -319,7 +319,7 @@
             <a:fld id="{1D8BD707-D9CF-40AE-B4C6-C98DA3205C09}" type="datetimeFigureOut">
               <a:rPr lang="en-US" smtClean="0"/>
               <a:pPr/>
-              <a:t>2/19/2023</a:t>
+              <a:t>3/3/2026</a:t>
             </a:fld>
             <a:endParaRPr lang="en-US"/>
           </a:p>
@@ -489,7 +489,7 @@
             <a:fld id="{1D8BD707-D9CF-40AE-B4C6-C98DA3205C09}" type="datetimeFigureOut">
               <a:rPr lang="en-US" smtClean="0"/>
               <a:pPr/>
-              <a:t>2/19/2023</a:t>
+              <a:t>3/3/2026</a:t>
             </a:fld>
             <a:endParaRPr lang="en-US"/>
           </a:p>
@@ -669,7 +669,7 @@
             <a:fld id="{1D8BD707-D9CF-40AE-B4C6-C98DA3205C09}" type="datetimeFigureOut">
               <a:rPr lang="en-US" smtClean="0"/>
               <a:pPr/>
-              <a:t>2/19/2023</a:t>
+              <a:t>3/3/2026</a:t>
             </a:fld>
             <a:endParaRPr lang="en-US"/>
           </a:p>
@@ -839,7 +839,7 @@
             <a:fld id="{1D8BD707-D9CF-40AE-B4C6-C98DA3205C09}" type="datetimeFigureOut">
               <a:rPr lang="en-US" smtClean="0"/>
               <a:pPr/>
-              <a:t>2/19/2023</a:t>
+              <a:t>3/3/2026</a:t>
             </a:fld>
             <a:endParaRPr lang="en-US"/>
           </a:p>
@@ -1086,7 +1086,7 @@
             <a:fld id="{1D8BD707-D9CF-40AE-B4C6-C98DA3205C09}" type="datetimeFigureOut">
               <a:rPr lang="en-US" smtClean="0"/>
               <a:pPr/>
-              <a:t>2/19/2023</a:t>
+              <a:t>3/3/2026</a:t>
             </a:fld>
             <a:endParaRPr lang="en-US"/>
           </a:p>
@@ -1373,7 +1373,7 @@
             <a:fld id="{1D8BD707-D9CF-40AE-B4C6-C98DA3205C09}" type="datetimeFigureOut">
               <a:rPr lang="en-US" smtClean="0"/>
               <a:pPr/>
-              <a:t>2/19/2023</a:t>
+              <a:t>3/3/2026</a:t>
             </a:fld>
             <a:endParaRPr lang="en-US"/>
           </a:p>
@@ -1794,7 +1794,7 @@
             <a:fld id="{1D8BD707-D9CF-40AE-B4C6-C98DA3205C09}" type="datetimeFigureOut">
               <a:rPr lang="en-US" smtClean="0"/>
               <a:pPr/>
-              <a:t>2/19/2023</a:t>
+              <a:t>3/3/2026</a:t>
             </a:fld>
             <a:endParaRPr lang="en-US"/>
           </a:p>
@@ -1913,7 +1913,7 @@
             <a:fld id="{1D8BD707-D9CF-40AE-B4C6-C98DA3205C09}" type="datetimeFigureOut">
               <a:rPr lang="en-US" smtClean="0"/>
               <a:pPr/>
-              <a:t>2/19/2023</a:t>
+              <a:t>3/3/2026</a:t>
             </a:fld>
             <a:endParaRPr lang="en-US"/>
           </a:p>
@@ -2010,7 +2010,7 @@
             <a:fld id="{1D8BD707-D9CF-40AE-B4C6-C98DA3205C09}" type="datetimeFigureOut">
               <a:rPr lang="en-US" smtClean="0"/>
               <a:pPr/>
-              <a:t>2/19/2023</a:t>
+              <a:t>3/3/2026</a:t>
             </a:fld>
             <a:endParaRPr lang="en-US"/>
           </a:p>
@@ -2287,7 +2287,7 @@
             <a:fld id="{1D8BD707-D9CF-40AE-B4C6-C98DA3205C09}" type="datetimeFigureOut">
               <a:rPr lang="en-US" smtClean="0"/>
               <a:pPr/>
-              <a:t>2/19/2023</a:t>
+              <a:t>3/3/2026</a:t>
             </a:fld>
             <a:endParaRPr lang="en-US"/>
           </a:p>
@@ -2541,7 +2541,7 @@
             <a:fld id="{1D8BD707-D9CF-40AE-B4C6-C98DA3205C09}" type="datetimeFigureOut">
               <a:rPr lang="en-US" smtClean="0"/>
               <a:pPr/>
-              <a:t>2/19/2023</a:t>
+              <a:t>3/3/2026</a:t>
             </a:fld>
             <a:endParaRPr lang="en-US"/>
           </a:p>
@@ -2754,7 +2754,7 @@
             <a:fld id="{1D8BD707-D9CF-40AE-B4C6-C98DA3205C09}" type="datetimeFigureOut">
               <a:rPr lang="en-US" smtClean="0"/>
               <a:pPr/>
-              <a:t>2/19/2023</a:t>
+              <a:t>3/3/2026</a:t>
             </a:fld>
             <a:endParaRPr lang="en-US"/>
           </a:p>
@@ -5127,7 +5127,7 @@
             </a:pPr>
             <a:r>
               <a:rPr lang="en-US" dirty="0"/>
-              <a:t>Pixels on screen, e.g., 200 pixels</a:t>
+              <a:t>Pixels on display, e.g., 200 pixels</a:t>
             </a:r>
           </a:p>
         </p:txBody>
@@ -5437,7 +5437,7 @@
             </a:pPr>
             <a:r>
               <a:rPr lang="en-US" dirty="0"/>
-              <a:t>Pixels on image:  e.g., 100 pixels</a:t>
+              <a:t>Texel on image:  e.g., 100 pixels</a:t>
             </a:r>
           </a:p>
           <a:p>
@@ -5624,7 +5624,7 @@
             </a:pPr>
             <a:r>
               <a:rPr lang="en-US" dirty="0"/>
-              <a:t>Pixels on image:  e.g., 400 pixels</a:t>
+              <a:t>Texels on image:  e.g., 400 pixels</a:t>
             </a:r>
           </a:p>
           <a:p>
@@ -6071,7 +6071,7 @@
               </a:pPr>
               <a:r>
                 <a:rPr lang="en-US" dirty="0"/>
-                <a:t>One pixel on image</a:t>
+                <a:t>One texel on image</a:t>
               </a:r>
             </a:p>
           </p:txBody>
@@ -7637,8 +7637,8 @@
         </p:nvSpPr>
         <p:spPr>
           <a:xfrm>
-            <a:off x="5666172" y="5053343"/>
-            <a:ext cx="1769335" cy="781973"/>
+            <a:off x="4406641" y="5533667"/>
+            <a:ext cx="4313322" cy="781973"/>
           </a:xfrm>
           <a:prstGeom prst="rect">
             <a:avLst/>
@@ -7646,7 +7646,7 @@
         </p:spPr>
         <p:txBody>
           <a:bodyPr vert="horz" lIns="91440" tIns="45720" rIns="91440" bIns="45720" rtlCol="0">
-            <a:normAutofit/>
+            <a:normAutofit fontScale="85000" lnSpcReduction="10000"/>
           </a:bodyPr>
           <a:lstStyle>
             <a:lvl1pPr marL="342900" indent="-342900" algn="l" defTabSz="914400" rtl="0" eaLnBrk="1" latinLnBrk="0" hangingPunct="1">
@@ -7791,8 +7791,15 @@
             </a:pPr>
             <a:r>
               <a:rPr lang="en-US" dirty="0"/>
-              <a:t>Average!</a:t>
-            </a:r>
+              <a:t>Multiple pixels </a:t>
+            </a:r>
+            <a:r>
+              <a:rPr lang="en-US" dirty="0">
+                <a:sym typeface="Wingdings" panose="05000000000000000000" pitchFamily="2" charset="2"/>
+              </a:rPr>
+              <a:t> Same Texel</a:t>
+            </a:r>
+            <a:endParaRPr lang="en-US" dirty="0"/>
           </a:p>
         </p:txBody>
       </p:sp>
@@ -8024,7 +8031,7 @@
             </a:pPr>
             <a:r>
               <a:rPr lang="en-US" dirty="0"/>
-              <a:t>One pixel on image</a:t>
+              <a:t>One texel on image</a:t>
             </a:r>
           </a:p>
         </p:txBody>
@@ -9778,8 +9785,8 @@
         </p:nvSpPr>
         <p:spPr>
           <a:xfrm>
-            <a:off x="5755096" y="5205774"/>
-            <a:ext cx="2673024" cy="966426"/>
+            <a:off x="4230665" y="5613669"/>
+            <a:ext cx="4728802" cy="966426"/>
           </a:xfrm>
           <a:prstGeom prst="rect">
             <a:avLst/>
@@ -9932,8 +9939,15 @@
             </a:pPr>
             <a:r>
               <a:rPr lang="en-US" dirty="0"/>
-              <a:t>What to do?</a:t>
-            </a:r>
+              <a:t>One pixel </a:t>
+            </a:r>
+            <a:r>
+              <a:rPr lang="en-US" dirty="0">
+                <a:sym typeface="Wingdings" panose="05000000000000000000" pitchFamily="2" charset="2"/>
+              </a:rPr>
+              <a:t>Multiple Texels</a:t>
+            </a:r>
+            <a:endParaRPr lang="en-US" dirty="0"/>
           </a:p>
         </p:txBody>
       </p:sp>
